--- a/docs/deck/out/cero-point-gotovye-sajty.pptx
+++ b/docs/deck/out/cero-point-gotovye-sajty.pptx
@@ -2696,7 +2696,7 @@
                   <a:srgbClr val="05050F"/>
                 </a:solidFill>
               </a:rPr>
-              <a:t>106 готовых сайтов на 80 шаблонах. У каждого — свой адрес, три языка, админка и заявки в Telegram.</a:t>
+              <a:t>122 готовых сайтов на 80 шаблонах. У каждого — свой адрес, три языка, админка и заявки в Telegram; у 62 — интернет-магазин с корзиной.</a:t>
             </a:r>
             <a:endParaRPr lang="en-US" sz="1600" dirty="0"/>
           </a:p>
@@ -7858,7 +7858,7 @@
                 <a:ea typeface="Arial Black" pitchFamily="34" charset="-122"/>
                 <a:cs typeface="Arial Black" pitchFamily="34" charset="-120"/>
               </a:rPr>
-              <a:t>106</a:t>
+              <a:t>122</a:t>
             </a:r>
             <a:endParaRPr lang="en-US" sz="4400" dirty="0"/>
           </a:p>
@@ -8062,7 +8062,7 @@
                 <a:ea typeface="Arial Black" pitchFamily="34" charset="-122"/>
                 <a:cs typeface="Arial Black" pitchFamily="34" charset="-120"/>
               </a:rPr>
-              <a:t>3</a:t>
+              <a:t>62</a:t>
             </a:r>
             <a:endParaRPr lang="en-US" sz="4400" dirty="0"/>
           </a:p>
@@ -8098,7 +8098,7 @@
                   <a:srgbClr val="4A4A5A"/>
                 </a:solidFill>
               </a:rPr>
-              <a:t>языка: русский, узбекский, английский</a:t>
+              <a:t>с интернет-магазином: корзина, заказ в Telegram</a:t>
             </a:r>
             <a:endParaRPr lang="en-US" sz="1200" dirty="0"/>
           </a:p>
@@ -8164,7 +8164,7 @@
                 <a:ea typeface="Arial Black" pitchFamily="34" charset="-122"/>
                 <a:cs typeface="Arial Black" pitchFamily="34" charset="-120"/>
               </a:rPr>
-              <a:t>16 · 16 · 12</a:t>
+              <a:t>20 · 20 · 20</a:t>
             </a:r>
             <a:endParaRPr lang="en-US" sz="2600" dirty="0"/>
           </a:p>
@@ -8727,7 +8727,7 @@
                   <a:srgbClr val="B4B3C6"/>
                 </a:solidFill>
               </a:rPr>
-              <a:t>Каждый на своём адресе &lt;имя&gt;.genkai.workers.dev, на трёх языках. Клиент смотрит до покупки.</a:t>
+              <a:t>Каждый на своём адресе &lt;имя&gt;.genkai.workers.dev, на трёх языках. Клиент смотрит до покупки; в магазинах можно пройти заказ до конца — сайт честно скажет, что это демо.</a:t>
             </a:r>
             <a:endParaRPr lang="en-US" sz="1100" dirty="0"/>
           </a:p>
